--- a/data-room/Navy_Commission/EXOS_Navy_Commission_Presentation_2026-08-11.pptx
+++ b/data-room/Navy_Commission/EXOS_Navy_Commission_Presentation_2026-08-11.pptx
@@ -25418,7 +25418,7 @@
                 </a:solidFill>
                 <a:latin typeface="Arial"/>
               </a:rPr>
-              <a:t>Profitable in 2025  ·  102% four-year revenue CAGR  ·  audited figures in the data room</a:t>
+              <a:t>Profitable in 2025  ·  102% four-year revenue CAGR  ·  management-prepared figures in the data room</a:t>
             </a:r>
           </a:p>
         </p:txBody>
